--- a/chapter12/parts/part-05-cap-sharding-consistency/clip.pptx
+++ b/chapter12/parts/part-05-cap-sharding-consistency/clip.pptx
@@ -4327,10 +4327,12 @@
           </a:bodyPr>
           <a:lstStyle/>
           <a:p>
-            <a:pPr>
+            <a:pPr lvl="0" marL="457200" indent="-228600">
+              <a:buFont typeface="Calibri"/>
               <a:spcAft>
                 <a:spcPts val="1000"/>
               </a:spcAft>
+              <a:buSzPct val="100000"/>
               <a:buChar char="•"/>
               <a:lnSpc>
                 <a:spcPts val="2200"/>
@@ -4347,10 +4349,12 @@
             </a:r>
           </a:p>
           <a:p>
-            <a:pPr>
+            <a:pPr lvl="0" marL="457200" indent="-228600">
+              <a:buFont typeface="Calibri"/>
               <a:spcAft>
                 <a:spcPts val="1000"/>
               </a:spcAft>
+              <a:buSzPct val="100000"/>
               <a:buChar char="•"/>
               <a:lnSpc>
                 <a:spcPts val="2200"/>
@@ -4367,10 +4371,12 @@
             </a:r>
           </a:p>
           <a:p>
-            <a:pPr>
+            <a:pPr lvl="0" marL="457200" indent="-228600">
+              <a:buFont typeface="Calibri"/>
               <a:spcAft>
                 <a:spcPts val="1000"/>
               </a:spcAft>
+              <a:buSzPct val="100000"/>
               <a:buChar char="•"/>
               <a:lnSpc>
                 <a:spcPts val="2200"/>
@@ -4387,10 +4393,12 @@
             </a:r>
           </a:p>
           <a:p>
-            <a:pPr>
+            <a:pPr lvl="0" marL="457200" indent="-228600">
+              <a:buFont typeface="Calibri"/>
               <a:spcAft>
                 <a:spcPts val="1000"/>
               </a:spcAft>
+              <a:buSzPct val="100000"/>
               <a:buChar char="•"/>
               <a:lnSpc>
                 <a:spcPts val="2200"/>
@@ -4526,10 +4534,12 @@
           </a:bodyPr>
           <a:lstStyle/>
           <a:p>
-            <a:pPr>
+            <a:pPr lvl="0" marL="457200" indent="-228600">
+              <a:buFont typeface="Calibri"/>
               <a:spcAft>
                 <a:spcPts val="1000"/>
               </a:spcAft>
+              <a:buSzPct val="100000"/>
               <a:buChar char="•"/>
               <a:lnSpc>
                 <a:spcPts val="2200"/>
@@ -4546,10 +4556,12 @@
             </a:r>
           </a:p>
           <a:p>
-            <a:pPr>
+            <a:pPr lvl="0" marL="457200" indent="-228600">
+              <a:buFont typeface="Calibri"/>
               <a:spcAft>
                 <a:spcPts val="1000"/>
               </a:spcAft>
+              <a:buSzPct val="100000"/>
               <a:buChar char="•"/>
               <a:lnSpc>
                 <a:spcPts val="2200"/>
@@ -4685,10 +4697,12 @@
           </a:bodyPr>
           <a:lstStyle/>
           <a:p>
-            <a:pPr>
+            <a:pPr lvl="0" marL="457200" indent="-228600">
+              <a:buFont typeface="Calibri"/>
               <a:spcAft>
                 <a:spcPts val="1000"/>
               </a:spcAft>
+              <a:buSzPct val="100000"/>
               <a:buChar char="•"/>
               <a:lnSpc>
                 <a:spcPts val="2200"/>
@@ -4824,10 +4838,12 @@
           </a:bodyPr>
           <a:lstStyle/>
           <a:p>
-            <a:pPr>
+            <a:pPr lvl="0" marL="457200" indent="-228600">
+              <a:buFont typeface="Calibri"/>
               <a:spcAft>
                 <a:spcPts val="1000"/>
               </a:spcAft>
+              <a:buSzPct val="100000"/>
               <a:buChar char="•"/>
               <a:lnSpc>
                 <a:spcPts val="2200"/>
@@ -4844,10 +4860,12 @@
             </a:r>
           </a:p>
           <a:p>
-            <a:pPr>
+            <a:pPr lvl="0" marL="457200" indent="-228600">
+              <a:buFont typeface="Calibri"/>
               <a:spcAft>
                 <a:spcPts val="1000"/>
               </a:spcAft>
+              <a:buSzPct val="100000"/>
               <a:buChar char="•"/>
               <a:lnSpc>
                 <a:spcPts val="2200"/>
@@ -4864,10 +4882,12 @@
             </a:r>
           </a:p>
           <a:p>
-            <a:pPr>
+            <a:pPr lvl="0" marL="457200" indent="-228600">
+              <a:buFont typeface="Calibri"/>
               <a:spcAft>
                 <a:spcPts val="1000"/>
               </a:spcAft>
+              <a:buSzPct val="100000"/>
               <a:buChar char="•"/>
               <a:lnSpc>
                 <a:spcPts val="2200"/>
@@ -4884,10 +4904,12 @@
             </a:r>
           </a:p>
           <a:p>
-            <a:pPr>
+            <a:pPr lvl="0" marL="457200" indent="-228600">
+              <a:buFont typeface="Calibri"/>
               <a:spcAft>
                 <a:spcPts val="1000"/>
               </a:spcAft>
+              <a:buSzPct val="100000"/>
               <a:buChar char="•"/>
               <a:lnSpc>
                 <a:spcPts val="2200"/>
@@ -5023,10 +5045,12 @@
           </a:bodyPr>
           <a:lstStyle/>
           <a:p>
-            <a:pPr>
+            <a:pPr lvl="0" marL="457200" indent="-228600">
+              <a:buFont typeface="Calibri"/>
               <a:spcAft>
                 <a:spcPts val="1000"/>
               </a:spcAft>
+              <a:buSzPct val="100000"/>
               <a:buChar char="•"/>
               <a:lnSpc>
                 <a:spcPts val="2200"/>
@@ -5043,10 +5067,12 @@
             </a:r>
           </a:p>
           <a:p>
-            <a:pPr>
+            <a:pPr lvl="0" marL="457200" indent="-228600">
+              <a:buFont typeface="Calibri"/>
               <a:spcAft>
                 <a:spcPts val="1000"/>
               </a:spcAft>
+              <a:buSzPct val="100000"/>
               <a:buChar char="•"/>
               <a:lnSpc>
                 <a:spcPts val="2200"/>
@@ -5063,10 +5089,12 @@
             </a:r>
           </a:p>
           <a:p>
-            <a:pPr>
+            <a:pPr lvl="0" marL="457200" indent="-228600">
+              <a:buFont typeface="Calibri"/>
               <a:spcAft>
                 <a:spcPts val="1000"/>
               </a:spcAft>
+              <a:buSzPct val="100000"/>
               <a:buChar char="•"/>
               <a:lnSpc>
                 <a:spcPts val="2200"/>
@@ -5202,10 +5230,12 @@
           </a:bodyPr>
           <a:lstStyle/>
           <a:p>
-            <a:pPr>
+            <a:pPr lvl="0" marL="457200" indent="-228600">
+              <a:buFont typeface="Calibri"/>
               <a:spcAft>
                 <a:spcPts val="1000"/>
               </a:spcAft>
+              <a:buSzPct val="100000"/>
               <a:buChar char="•"/>
               <a:lnSpc>
                 <a:spcPts val="2200"/>
@@ -5222,10 +5252,12 @@
             </a:r>
           </a:p>
           <a:p>
-            <a:pPr>
+            <a:pPr lvl="0" marL="457200" indent="-228600">
+              <a:buFont typeface="Calibri"/>
               <a:spcAft>
                 <a:spcPts val="1000"/>
               </a:spcAft>
+              <a:buSzPct val="100000"/>
               <a:buChar char="•"/>
               <a:lnSpc>
                 <a:spcPts val="2200"/>
@@ -5242,10 +5274,12 @@
             </a:r>
           </a:p>
           <a:p>
-            <a:pPr>
+            <a:pPr lvl="0" marL="457200" indent="-228600">
+              <a:buFont typeface="Calibri"/>
               <a:spcAft>
                 <a:spcPts val="1000"/>
               </a:spcAft>
+              <a:buSzPct val="100000"/>
               <a:buChar char="•"/>
               <a:lnSpc>
                 <a:spcPts val="2200"/>
@@ -5262,10 +5296,12 @@
             </a:r>
           </a:p>
           <a:p>
-            <a:pPr>
+            <a:pPr lvl="0" marL="457200" indent="-228600">
+              <a:buFont typeface="Calibri"/>
               <a:spcAft>
                 <a:spcPts val="1000"/>
               </a:spcAft>
+              <a:buSzPct val="100000"/>
               <a:buChar char="•"/>
               <a:lnSpc>
                 <a:spcPts val="2200"/>
@@ -5282,10 +5318,12 @@
             </a:r>
           </a:p>
           <a:p>
-            <a:pPr>
+            <a:pPr lvl="0" marL="457200" indent="-228600">
+              <a:buFont typeface="Calibri"/>
               <a:spcAft>
                 <a:spcPts val="1000"/>
               </a:spcAft>
+              <a:buSzPct val="100000"/>
               <a:buChar char="•"/>
               <a:lnSpc>
                 <a:spcPts val="2200"/>
@@ -5884,10 +5922,12 @@
           </a:bodyPr>
           <a:lstStyle/>
           <a:p>
-            <a:pPr>
+            <a:pPr lvl="0" marL="457200" indent="-228600">
+              <a:buFont typeface="Calibri"/>
               <a:spcAft>
                 <a:spcPts val="1000"/>
               </a:spcAft>
+              <a:buSzPct val="100000"/>
               <a:buChar char="•"/>
               <a:lnSpc>
                 <a:spcPts val="2200"/>
@@ -5904,10 +5944,12 @@
             </a:r>
           </a:p>
           <a:p>
-            <a:pPr>
+            <a:pPr lvl="0" marL="457200" indent="-228600">
+              <a:buFont typeface="Calibri"/>
               <a:spcAft>
                 <a:spcPts val="1000"/>
               </a:spcAft>
+              <a:buSzPct val="100000"/>
               <a:buChar char="•"/>
               <a:lnSpc>
                 <a:spcPts val="2200"/>
@@ -5924,10 +5966,12 @@
             </a:r>
           </a:p>
           <a:p>
-            <a:pPr>
+            <a:pPr lvl="0" marL="457200" indent="-228600">
+              <a:buFont typeface="Calibri"/>
               <a:spcAft>
                 <a:spcPts val="1000"/>
               </a:spcAft>
+              <a:buSzPct val="100000"/>
               <a:buChar char="•"/>
               <a:lnSpc>
                 <a:spcPts val="2200"/>
@@ -5944,10 +5988,12 @@
             </a:r>
           </a:p>
           <a:p>
-            <a:pPr>
+            <a:pPr lvl="0" marL="457200" indent="-228600">
+              <a:buFont typeface="Calibri"/>
               <a:spcAft>
                 <a:spcPts val="1000"/>
               </a:spcAft>
+              <a:buSzPct val="100000"/>
               <a:buChar char="•"/>
               <a:lnSpc>
                 <a:spcPts val="2200"/>
@@ -5964,10 +6010,12 @@
             </a:r>
           </a:p>
           <a:p>
-            <a:pPr>
+            <a:pPr lvl="0" marL="457200" indent="-228600">
+              <a:buFont typeface="Calibri"/>
               <a:spcAft>
                 <a:spcPts val="1000"/>
               </a:spcAft>
+              <a:buSzPct val="100000"/>
               <a:buChar char="•"/>
               <a:lnSpc>
                 <a:spcPts val="2200"/>
@@ -6103,10 +6151,12 @@
           </a:bodyPr>
           <a:lstStyle/>
           <a:p>
-            <a:pPr>
+            <a:pPr lvl="0" marL="457200" indent="-228600">
+              <a:buFont typeface="Calibri"/>
               <a:spcAft>
                 <a:spcPts val="1000"/>
               </a:spcAft>
+              <a:buSzPct val="100000"/>
               <a:buChar char="•"/>
               <a:lnSpc>
                 <a:spcPts val="2200"/>
@@ -6123,10 +6173,12 @@
             </a:r>
           </a:p>
           <a:p>
-            <a:pPr>
+            <a:pPr lvl="0" marL="457200" indent="-228600">
+              <a:buFont typeface="Calibri"/>
               <a:spcAft>
                 <a:spcPts val="1000"/>
               </a:spcAft>
+              <a:buSzPct val="100000"/>
               <a:buChar char="•"/>
               <a:lnSpc>
                 <a:spcPts val="2200"/>
@@ -6143,10 +6195,12 @@
             </a:r>
           </a:p>
           <a:p>
-            <a:pPr>
+            <a:pPr lvl="0" marL="457200" indent="-228600">
+              <a:buFont typeface="Calibri"/>
               <a:spcAft>
                 <a:spcPts val="1000"/>
               </a:spcAft>
+              <a:buSzPct val="100000"/>
               <a:buChar char="•"/>
               <a:lnSpc>
                 <a:spcPts val="2200"/>
@@ -6163,10 +6217,12 @@
             </a:r>
           </a:p>
           <a:p>
-            <a:pPr>
+            <a:pPr lvl="0" marL="457200" indent="-228600">
+              <a:buFont typeface="Calibri"/>
               <a:spcAft>
                 <a:spcPts val="1000"/>
               </a:spcAft>
+              <a:buSzPct val="100000"/>
               <a:buChar char="•"/>
               <a:lnSpc>
                 <a:spcPts val="2200"/>
@@ -6183,10 +6239,12 @@
             </a:r>
           </a:p>
           <a:p>
-            <a:pPr>
+            <a:pPr lvl="0" marL="457200" indent="-228600">
+              <a:buFont typeface="Calibri"/>
               <a:spcAft>
                 <a:spcPts val="1000"/>
               </a:spcAft>
+              <a:buSzPct val="100000"/>
               <a:buChar char="•"/>
               <a:lnSpc>
                 <a:spcPts val="2200"/>
@@ -6203,10 +6261,12 @@
             </a:r>
           </a:p>
           <a:p>
-            <a:pPr>
+            <a:pPr lvl="0" marL="457200" indent="-228600">
+              <a:buFont typeface="Calibri"/>
               <a:spcAft>
                 <a:spcPts val="1000"/>
               </a:spcAft>
+              <a:buSzPct val="100000"/>
               <a:buChar char="•"/>
               <a:lnSpc>
                 <a:spcPts val="2200"/>
@@ -6342,10 +6402,12 @@
           </a:bodyPr>
           <a:lstStyle/>
           <a:p>
-            <a:pPr>
+            <a:pPr lvl="0" marL="457200" indent="-228600">
+              <a:buFont typeface="Calibri"/>
               <a:spcAft>
                 <a:spcPts val="1000"/>
               </a:spcAft>
+              <a:buSzPct val="100000"/>
               <a:buChar char="•"/>
               <a:lnSpc>
                 <a:spcPts val="2200"/>
@@ -6362,10 +6424,12 @@
             </a:r>
           </a:p>
           <a:p>
-            <a:pPr>
+            <a:pPr lvl="0" marL="457200" indent="-228600">
+              <a:buFont typeface="Calibri"/>
               <a:spcAft>
                 <a:spcPts val="1000"/>
               </a:spcAft>
+              <a:buSzPct val="100000"/>
               <a:buChar char="•"/>
               <a:lnSpc>
                 <a:spcPts val="2200"/>
@@ -6382,10 +6446,12 @@
             </a:r>
           </a:p>
           <a:p>
-            <a:pPr>
+            <a:pPr lvl="0" marL="457200" indent="-228600">
+              <a:buFont typeface="Calibri"/>
               <a:spcAft>
                 <a:spcPts val="1000"/>
               </a:spcAft>
+              <a:buSzPct val="100000"/>
               <a:buChar char="•"/>
               <a:lnSpc>
                 <a:spcPts val="2200"/>
@@ -6402,10 +6468,12 @@
             </a:r>
           </a:p>
           <a:p>
-            <a:pPr>
+            <a:pPr lvl="0" marL="457200" indent="-228600">
+              <a:buFont typeface="Calibri"/>
               <a:spcAft>
                 <a:spcPts val="1000"/>
               </a:spcAft>
+              <a:buSzPct val="100000"/>
               <a:buChar char="•"/>
               <a:lnSpc>
                 <a:spcPts val="2200"/>
